--- a/assets/ppts/M2.2.4_Multicast_Routing_Protocols.pptx
+++ b/assets/ppts/M2.2.4_Multicast_Routing_Protocols.pptx
@@ -8,6 +8,7 @@
     <p:sldId id="256" r:id="rId7"/>
     <p:sldId id="257" r:id="rId8"/>
     <p:sldId id="258" r:id="rId9"/>
+    <p:sldId id="259" r:id="rId10"/>
   </p:sldIdLst>
   <p:sldSz cx="12191695" cy="6858000" type="screen4x3"/>
   <p:notesSz cx="6858000" cy="9144000"/>
@@ -3141,8 +3142,8 @@
         </p:nvSpPr>
         <p:spPr>
           <a:xfrm>
-            <a:off x="822960" y="1188720"/>
-            <a:ext cx="164592" cy="4480560"/>
+            <a:off x="0" y="0"/>
+            <a:ext cx="12191695" cy="137160"/>
           </a:xfrm>
           <a:prstGeom prst="rect">
             <a:avLst/>
@@ -3178,14 +3179,57 @@
       </p:sp>
       <p:sp>
         <p:nvSpPr>
-          <p:cNvPr id="4" name="TextBox 3"/>
+          <p:cNvPr id="4" name="Rectangle 3"/>
+          <p:cNvSpPr/>
+          <p:nvPr/>
+        </p:nvSpPr>
+        <p:spPr>
+          <a:xfrm>
+            <a:off x="822960" y="1097280"/>
+            <a:ext cx="164592" cy="4663440"/>
+          </a:xfrm>
+          <a:prstGeom prst="rect">
+            <a:avLst/>
+          </a:prstGeom>
+          <a:solidFill>
+            <a:srgbClr val="D97706"/>
+          </a:solidFill>
+          <a:ln>
+            <a:noFill/>
+          </a:ln>
+        </p:spPr>
+        <p:style>
+          <a:lnRef idx="1">
+            <a:schemeClr val="accent1"/>
+          </a:lnRef>
+          <a:fillRef idx="3">
+            <a:schemeClr val="accent1"/>
+          </a:fillRef>
+          <a:effectRef idx="2">
+            <a:schemeClr val="accent1"/>
+          </a:effectRef>
+          <a:fontRef idx="minor">
+            <a:schemeClr val="lt1"/>
+          </a:fontRef>
+        </p:style>
+        <p:txBody>
+          <a:bodyPr rtlCol="0" anchor="ctr"/>
+          <a:lstStyle/>
+          <a:p>
+            <a:pPr algn="ctr"/>
+          </a:p>
+        </p:txBody>
+      </p:sp>
+      <p:sp>
+        <p:nvSpPr>
+          <p:cNvPr id="5" name="TextBox 4"/>
           <p:cNvSpPr txBox="1"/>
           <p:nvPr/>
         </p:nvSpPr>
         <p:spPr>
           <a:xfrm>
-            <a:off x="1280160" y="1097280"/>
-            <a:ext cx="10058400" cy="4663440"/>
+            <a:off x="1234440" y="1005840"/>
+            <a:ext cx="10241280" cy="4846320"/>
           </a:xfrm>
           <a:prstGeom prst="rect">
             <a:avLst/>
@@ -3200,70 +3244,165 @@
           <a:p>
             <a:pPr>
               <a:spcAft>
+                <a:spcPts val="1000"/>
+              </a:spcAft>
+              <a:defRPr b="1" sz="1300">
+                <a:solidFill>
+                  <a:srgbClr val="D97706"/>
+                </a:solidFill>
+              </a:defRPr>
+            </a:pPr>
+            <a:r>
+              <a:t>PCCST501 Computer Networks | KTU 2024 Scheme • MODULE 2 • M2.2.4</a:t>
+            </a:r>
+          </a:p>
+          <a:p>
+            <a:pPr>
+              <a:spcAft>
                 <a:spcPts val="1200"/>
               </a:spcAft>
-              <a:defRPr b="1" sz="1300">
-                <a:solidFill>
-                  <a:srgbClr val="D97706"/>
+              <a:defRPr b="1" sz="3000">
+                <a:solidFill>
+                  <a:srgbClr val="F8FAFC"/>
                 </a:solidFill>
               </a:defRPr>
             </a:pPr>
             <a:r>
-              <a:t>PCCST501 Computer Networks | KTU 2024 Scheme • MODULE 2 • M2.2.4</a:t>
+              <a:t>Multicast Routing Protocols &amp; IGMP</a:t>
             </a:r>
           </a:p>
           <a:p>
             <a:pPr>
               <a:spcAft>
-                <a:spcPts val="1400"/>
+                <a:spcPts val="2400"/>
               </a:spcAft>
-              <a:defRPr b="1" sz="3200">
-                <a:solidFill>
-                  <a:srgbClr val="F8FAFC"/>
+              <a:defRPr sz="1600">
+                <a:solidFill>
+                  <a:srgbClr val="94A3B8"/>
                 </a:solidFill>
               </a:defRPr>
             </a:pPr>
             <a:r>
-              <a:t>Multicast Routing Protocols</a:t>
+              <a:t>Multicast Addressing (Class D), IGMP Host-Router Membership, Source-Based Trees vs Group-Shared Trees, RPF, PIM-DM vs PIM-SM</a:t>
             </a:r>
           </a:p>
           <a:p>
             <a:pPr>
               <a:spcAft>
-                <a:spcPts val="2800"/>
+                <a:spcPts val="300"/>
               </a:spcAft>
-              <a:defRPr sz="1700">
+              <a:defRPr b="1" sz="1350">
+                <a:solidFill>
+                  <a:srgbClr val="E2E8F0"/>
+                </a:solidFill>
+              </a:defRPr>
+            </a:pPr>
+            <a:r>
+              <a:t>Prepared by: Prof. Anju Markose | Assistant Professor, Dept. of CSE | VJCET</a:t>
+            </a:r>
+          </a:p>
+          <a:p>
+            <a:pPr>
+              <a:defRPr sz="1150">
                 <a:solidFill>
                   <a:srgbClr val="94A3B8"/>
                 </a:solidFill>
               </a:defRPr>
             </a:pPr>
             <a:r>
-              <a:t>Multicasting Fundamentals, IGMP Group Management, Source-Based Trees, Shared Trees, DVMRP, MOSPF &amp; PIM</a:t>
-            </a:r>
-          </a:p>
+              <a:t>Viswajyothi College of Engineering and Technology (VJCET), Vazhakulam • KTU S5 CSE</a:t>
+            </a:r>
+          </a:p>
+        </p:txBody>
+      </p:sp>
+      <p:sp>
+        <p:nvSpPr>
+          <p:cNvPr id="6" name="Rounded Rectangle 5"/>
+          <p:cNvSpPr/>
+          <p:nvPr/>
+        </p:nvSpPr>
+        <p:spPr>
+          <a:xfrm>
+            <a:off x="8412480" y="5120640"/>
+            <a:ext cx="3017520" cy="822960"/>
+          </a:xfrm>
+          <a:prstGeom prst="roundRect">
+            <a:avLst/>
+          </a:prstGeom>
+          <a:solidFill>
+            <a:srgbClr val="1E293B"/>
+          </a:solidFill>
+          <a:ln w="12700">
+            <a:solidFill>
+              <a:srgbClr val="0E7490"/>
+            </a:solidFill>
+          </a:ln>
+        </p:spPr>
+        <p:style>
+          <a:lnRef idx="1">
+            <a:schemeClr val="accent1"/>
+          </a:lnRef>
+          <a:fillRef idx="3">
+            <a:schemeClr val="accent1"/>
+          </a:fillRef>
+          <a:effectRef idx="2">
+            <a:schemeClr val="accent1"/>
+          </a:effectRef>
+          <a:fontRef idx="minor">
+            <a:schemeClr val="lt1"/>
+          </a:fontRef>
+        </p:style>
+        <p:txBody>
+          <a:bodyPr rtlCol="0" anchor="ctr"/>
+          <a:lstStyle/>
+          <a:p>
+            <a:pPr algn="ctr"/>
+          </a:p>
+        </p:txBody>
+      </p:sp>
+      <p:sp>
+        <p:nvSpPr>
+          <p:cNvPr id="7" name="TextBox 6"/>
+          <p:cNvSpPr txBox="1"/>
+          <p:nvPr/>
+        </p:nvSpPr>
+        <p:spPr>
+          <a:xfrm>
+            <a:off x="8503920" y="5166360"/>
+            <a:ext cx="2834640" cy="731520"/>
+          </a:xfrm>
+          <a:prstGeom prst="rect">
+            <a:avLst/>
+          </a:prstGeom>
+          <a:noFill/>
+        </p:spPr>
+        <p:txBody>
+          <a:bodyPr wrap="none">
+            <a:spAutoFit/>
+          </a:bodyPr>
+          <a:lstStyle/>
           <a:p>
             <a:pPr>
-              <a:defRPr b="1" sz="1300">
-                <a:solidFill>
-                  <a:srgbClr val="E2E8F0"/>
+              <a:defRPr b="1" sz="1050">
+                <a:solidFill>
+                  <a:srgbClr val="D97706"/>
                 </a:solidFill>
               </a:defRPr>
             </a:pPr>
             <a:r>
-              <a:t>Prepared by: Prof. Anju Markose | Assistant Professor, Dept. of CSE | VJCET</a:t>
+              <a:t>KTU B.Tech Curriculum</a:t>
             </a:r>
           </a:p>
           <a:p>
             <a:pPr>
-              <a:defRPr sz="1100">
-                <a:solidFill>
-                  <a:srgbClr val="94A3B8"/>
+              <a:defRPr sz="950">
+                <a:solidFill>
+                  <a:srgbClr val="F8FAFC"/>
                 </a:solidFill>
               </a:defRPr>
             </a:pPr>
             <a:r>
-              <a:t>Viswajyothi College of Engineering and Technology (VJCET), Vazhakulam</a:t>
+              <a:t>Official Classroom Slide Deck</a:t>
             </a:r>
           </a:p>
         </p:txBody>
@@ -3395,14 +3534,14 @@
           <a:lstStyle/>
           <a:p>
             <a:pPr>
-              <a:defRPr b="1" sz="2300">
+              <a:defRPr b="1" sz="2200">
                 <a:solidFill>
                   <a:srgbClr val="F8FAFC"/>
                 </a:solidFill>
               </a:defRPr>
             </a:pPr>
             <a:r>
-              <a:t>2.2.4.1 Multicast Fundamentals &amp; IGMP</a:t>
+              <a:t>2.2.4.1 Multicast Fundamentals &amp; IGMP Protocol</a:t>
             </a:r>
           </a:p>
         </p:txBody>
@@ -3450,7 +3589,7 @@
         </p:nvSpPr>
         <p:spPr>
           <a:xfrm>
-            <a:off x="731520" y="1280160"/>
+            <a:off x="731520" y="1234440"/>
             <a:ext cx="6858000" cy="4937760"/>
           </a:xfrm>
           <a:prstGeom prst="rect">
@@ -3468,7 +3607,7 @@
               <a:spcAft>
                 <a:spcPts val="200"/>
               </a:spcAft>
-              <a:defRPr b="1" sz="1500">
+              <a:defRPr b="1" sz="1450">
                 <a:solidFill>
                   <a:srgbClr val="0F1E4A"/>
                 </a:solidFill>
@@ -3481,16 +3620,16 @@
           <a:p>
             <a:pPr>
               <a:spcAft>
-                <a:spcPts val="800"/>
+                <a:spcPts val="700"/>
               </a:spcAft>
-              <a:defRPr sz="1300">
-                <a:solidFill>
-                  <a:srgbClr val="1E293B"/>
+              <a:defRPr sz="1250">
+                <a:solidFill>
+                  <a:srgbClr val="0F172A"/>
                 </a:solidFill>
               </a:defRPr>
             </a:pPr>
             <a:r>
-              <a:t>   One source sends data packets to multiple designated receivers belonging to a multicast group using a single Class D multicast address (`224.0.0.0/4`).</a:t>
+              <a:t>   Delivering a single stream of datagrams from one or more sources to a specific group of interested receivers simultaneously without duplicate packet transmission on shared links.</a:t>
             </a:r>
           </a:p>
           <a:p>
@@ -3498,29 +3637,29 @@
               <a:spcAft>
                 <a:spcPts val="200"/>
               </a:spcAft>
-              <a:defRPr b="1" sz="1500">
+              <a:defRPr b="1" sz="1450">
                 <a:solidFill>
                   <a:srgbClr val="0F1E4A"/>
                 </a:solidFill>
               </a:defRPr>
             </a:pPr>
             <a:r>
-              <a:t>• Internet Group Management Protocol (IGMP)</a:t>
+              <a:t>• Multicast Addressing</a:t>
             </a:r>
           </a:p>
           <a:p>
             <a:pPr>
               <a:spcAft>
-                <a:spcPts val="800"/>
+                <a:spcPts val="700"/>
               </a:spcAft>
-              <a:defRPr sz="1300">
-                <a:solidFill>
-                  <a:srgbClr val="1E293B"/>
+              <a:defRPr sz="1250">
+                <a:solidFill>
+                  <a:srgbClr val="0F172A"/>
                 </a:solidFill>
               </a:defRPr>
             </a:pPr>
             <a:r>
-              <a:t>   Operates between local hosts and their directly attached first-hop router. Enables hosts to join or leave multicast groups dynamically.</a:t>
+              <a:t>   IPv4 Class D range `224.0.0.0` to `239.255.255.255`. Special groups: `224.0.0.1` (All systems on subnet), `224.0.0.2` (All routers).</a:t>
             </a:r>
           </a:p>
           <a:p>
@@ -3528,29 +3667,29 @@
               <a:spcAft>
                 <a:spcPts val="200"/>
               </a:spcAft>
-              <a:defRPr b="1" sz="1500">
+              <a:defRPr b="1" sz="1450">
                 <a:solidFill>
                   <a:srgbClr val="0F1E4A"/>
                 </a:solidFill>
               </a:defRPr>
             </a:pPr>
             <a:r>
-              <a:t>• IGMP Message Types</a:t>
+              <a:t>• IGMP (Internet Group Management Protocol - RFC 3376)</a:t>
             </a:r>
           </a:p>
           <a:p>
             <a:pPr>
               <a:spcAft>
-                <a:spcPts val="800"/>
+                <a:spcPts val="700"/>
               </a:spcAft>
-              <a:defRPr sz="1300">
-                <a:solidFill>
-                  <a:srgbClr val="1E293B"/>
+              <a:defRPr sz="1250">
+                <a:solidFill>
+                  <a:srgbClr val="0F172A"/>
                 </a:solidFill>
               </a:defRPr>
             </a:pPr>
             <a:r>
-              <a:t>   Membership Query (router queries group members), Membership Report (host announces group join), Leave Group (host departs).</a:t>
+              <a:t>   Operates locally between end hosts and their attached first-hop multicast router. Hosts send IGMP Membership Reports; router sends periodic Membership Queries.</a:t>
             </a:r>
           </a:p>
           <a:p>
@@ -3558,29 +3697,59 @@
               <a:spcAft>
                 <a:spcPts val="200"/>
               </a:spcAft>
-              <a:defRPr b="1" sz="1500">
+              <a:defRPr b="1" sz="1450">
                 <a:solidFill>
                   <a:srgbClr val="0F1E4A"/>
                 </a:solidFill>
               </a:defRPr>
             </a:pPr>
             <a:r>
-              <a:t>• Source-Based Trees vs Group-Shared Trees</a:t>
+              <a:t>• Multicast Routing Trees</a:t>
             </a:r>
           </a:p>
           <a:p>
             <a:pPr>
               <a:spcAft>
-                <a:spcPts val="800"/>
+                <a:spcPts val="700"/>
               </a:spcAft>
-              <a:defRPr sz="1300">
-                <a:solidFill>
-                  <a:srgbClr val="1E293B"/>
+              <a:defRPr sz="1250">
+                <a:solidFill>
+                  <a:srgbClr val="0F172A"/>
                 </a:solidFill>
               </a:defRPr>
             </a:pPr>
             <a:r>
-              <a:t>   Source-Based: Builds a distinct shortest path tree rooted at each sender (e.g. DVMRP, MOSPF, PIM-DM). Shared Tree: All senders route traffic through a single central Rendezvous Point (RP) shared tree (e.g. PIM-SM).</a:t>
+              <a:t>   1. **Source-Based Tree (Shortest Path Tree)**: Builds a separate tree rooted at each sender source (used in DVMRP, PIM-DM). 2. **Group-Shared Tree (Core-Based Tree)**: All sources transmit to a shared Rendezvous Point (RP) / Core router (used in PIM-SM).</a:t>
+            </a:r>
+          </a:p>
+          <a:p>
+            <a:pPr>
+              <a:spcAft>
+                <a:spcPts val="200"/>
+              </a:spcAft>
+              <a:defRPr b="1" sz="1450">
+                <a:solidFill>
+                  <a:srgbClr val="0F1E4A"/>
+                </a:solidFill>
+              </a:defRPr>
+            </a:pPr>
+            <a:r>
+              <a:t>• Reverse Path Forwarding (RPF)</a:t>
+            </a:r>
+          </a:p>
+          <a:p>
+            <a:pPr>
+              <a:spcAft>
+                <a:spcPts val="700"/>
+              </a:spcAft>
+              <a:defRPr sz="1250">
+                <a:solidFill>
+                  <a:srgbClr val="0F172A"/>
+                </a:solidFill>
+              </a:defRPr>
+            </a:pPr>
+            <a:r>
+              <a:t>   Loop-prevention rule: Router accepts a multicast packet only if it arrived on the interface that is the shortest path back to the sender source.</a:t>
             </a:r>
           </a:p>
         </p:txBody>
@@ -3593,14 +3762,14 @@
         </p:nvSpPr>
         <p:spPr>
           <a:xfrm>
-            <a:off x="7955279" y="1280160"/>
-            <a:ext cx="3566160" cy="4846320"/>
+            <a:off x="7955279" y="1234440"/>
+            <a:ext cx="3566160" cy="4892040"/>
           </a:xfrm>
           <a:prstGeom prst="roundRect">
             <a:avLst/>
           </a:prstGeom>
           <a:solidFill>
-            <a:srgbClr val="F1F5F9"/>
+            <a:srgbClr val="F8FAFC"/>
           </a:solidFill>
           <a:ln w="19050">
             <a:solidFill>
@@ -3638,7 +3807,7 @@
         </p:nvSpPr>
         <p:spPr>
           <a:xfrm>
-            <a:off x="8138160" y="1417320"/>
+            <a:off x="8138160" y="1371600"/>
             <a:ext cx="3200400" cy="4572000"/>
           </a:xfrm>
           <a:prstGeom prst="rect">
@@ -3663,7 +3832,7 @@
               </a:defRPr>
             </a:pPr>
             <a:r>
-              <a:t>Multicast Trees</a:t>
+              <a:t>Key Mechanisms</a:t>
             </a:r>
           </a:p>
           <a:p>
@@ -3673,12 +3842,12 @@
               </a:spcAft>
               <a:defRPr sz="1200">
                 <a:solidFill>
-                  <a:srgbClr val="1E293B"/>
+                  <a:srgbClr val="0F172A"/>
                 </a:solidFill>
               </a:defRPr>
             </a:pPr>
             <a:r>
-              <a:t>→ Class D IPs: 224.0.0.0 - 239.255.255.255</a:t>
+              <a:t>→ Class D: 224.0.0.0/4</a:t>
             </a:r>
           </a:p>
           <a:p>
@@ -3688,12 +3857,12 @@
               </a:spcAft>
               <a:defRPr sz="1200">
                 <a:solidFill>
-                  <a:srgbClr val="1E293B"/>
+                  <a:srgbClr val="0F172A"/>
                 </a:solidFill>
               </a:defRPr>
             </a:pPr>
             <a:r>
-              <a:t>→ IGMP: Host-to-Router signaling</a:t>
+              <a:t>→ IGMP: Local group membership</a:t>
             </a:r>
           </a:p>
           <a:p>
@@ -3703,12 +3872,12 @@
               </a:spcAft>
               <a:defRPr sz="1200">
                 <a:solidFill>
-                  <a:srgbClr val="1E293B"/>
+                  <a:srgbClr val="0F172A"/>
                 </a:solidFill>
               </a:defRPr>
             </a:pPr>
             <a:r>
-              <a:t>→ Source Tree: Optimal delay per sender</a:t>
+              <a:t>→ Source Tree: Optimal delay per source</a:t>
             </a:r>
           </a:p>
           <a:p>
@@ -3718,12 +3887,27 @@
               </a:spcAft>
               <a:defRPr sz="1200">
                 <a:solidFill>
-                  <a:srgbClr val="1E293B"/>
+                  <a:srgbClr val="0F172A"/>
                 </a:solidFill>
               </a:defRPr>
             </a:pPr>
             <a:r>
-              <a:t>→ Shared Tree: Less router memory state</a:t>
+              <a:t>→ Shared Tree: Minimal router state</a:t>
+            </a:r>
+          </a:p>
+          <a:p>
+            <a:pPr>
+              <a:spcAft>
+                <a:spcPts val="600"/>
+              </a:spcAft>
+              <a:defRPr sz="1200">
+                <a:solidFill>
+                  <a:srgbClr val="0F172A"/>
+                </a:solidFill>
+              </a:defRPr>
+            </a:pPr>
+            <a:r>
+              <a:t>→ RPF: Prevents multicast loops</a:t>
             </a:r>
           </a:p>
         </p:txBody>
@@ -3736,8 +3920,8 @@
         </p:nvSpPr>
         <p:spPr>
           <a:xfrm>
-            <a:off x="731520" y="6309360"/>
-            <a:ext cx="10789920" cy="365760"/>
+            <a:off x="731520" y="6327648"/>
+            <a:ext cx="10789920" cy="320040"/>
           </a:xfrm>
           <a:prstGeom prst="rect">
             <a:avLst/>
@@ -3759,6 +3943,41 @@
             </a:pPr>
             <a:r>
               <a:t>PCCST501 Computer Networks | KTU 2024 Scheme | Prof. Anju Markose | Assistant Professor, Dept. of CSE | VJCET</a:t>
+            </a:r>
+          </a:p>
+        </p:txBody>
+      </p:sp>
+      <p:sp>
+        <p:nvSpPr>
+          <p:cNvPr id="10" name="TextBox 9"/>
+          <p:cNvSpPr txBox="1"/>
+          <p:nvPr/>
+        </p:nvSpPr>
+        <p:spPr>
+          <a:xfrm>
+            <a:off x="6858000" y="6327648"/>
+            <a:ext cx="4572000" cy="320040"/>
+          </a:xfrm>
+          <a:prstGeom prst="rect">
+            <a:avLst/>
+          </a:prstGeom>
+          <a:noFill/>
+        </p:spPr>
+        <p:txBody>
+          <a:bodyPr wrap="none">
+            <a:spAutoFit/>
+          </a:bodyPr>
+          <a:lstStyle/>
+          <a:p>
+            <a:pPr algn="r">
+              <a:defRPr sz="950">
+                <a:solidFill>
+                  <a:srgbClr val="64748B"/>
+                </a:solidFill>
+              </a:defRPr>
+            </a:pPr>
+            <a:r>
+              <a:t>Dept. of CSE, VJCET</a:t>
             </a:r>
           </a:p>
         </p:txBody>
@@ -3890,14 +4109,14 @@
           <a:lstStyle/>
           <a:p>
             <a:pPr>
-              <a:defRPr b="1" sz="2300">
+              <a:defRPr b="1" sz="2200">
                 <a:solidFill>
                   <a:srgbClr val="F8FAFC"/>
                 </a:solidFill>
               </a:defRPr>
             </a:pPr>
             <a:r>
-              <a:t>2.2.4.2 Multicast Routing Protocols Comparison</a:t>
+              <a:t>2.2.4.2 PIM Protocols: Dense Mode (PIM-DM) vs Sparse Mode (PIM-SM)</a:t>
             </a:r>
           </a:p>
         </p:txBody>
@@ -3932,7 +4151,7 @@
               </a:defRPr>
             </a:pPr>
             <a:r>
-              <a:t>M2.2.4 MULTICAST PROTOCOLS</a:t>
+              <a:t>M2.2.4 PIM DENSE VS SPARSE</a:t>
             </a:r>
           </a:p>
         </p:txBody>
@@ -3945,18 +4164,18 @@
         </p:nvSpPr>
         <p:spPr>
           <a:xfrm>
-            <a:off x="731520" y="1280160"/>
-            <a:ext cx="5212080" cy="4846320"/>
+            <a:off x="731520" y="1234440"/>
+            <a:ext cx="5212080" cy="4892040"/>
           </a:xfrm>
           <a:prstGeom prst="roundRect">
             <a:avLst/>
           </a:prstGeom>
           <a:solidFill>
-            <a:srgbClr val="F1F5F9"/>
+            <a:srgbClr val="F8FAFC"/>
           </a:solidFill>
           <a:ln w="19050">
             <a:solidFill>
-              <a:srgbClr val="0E7490"/>
+              <a:srgbClr val="0F1E4A"/>
             </a:solidFill>
           </a:ln>
         </p:spPr>
@@ -3990,7 +4209,7 @@
         </p:nvSpPr>
         <p:spPr>
           <a:xfrm>
-            <a:off x="914400" y="1417320"/>
+            <a:off x="914400" y="1371600"/>
             <a:ext cx="4846320" cy="4572000"/>
           </a:xfrm>
           <a:prstGeom prst="rect">
@@ -4006,76 +4225,76 @@
           <a:p>
             <a:pPr>
               <a:spcAft>
-                <a:spcPts val="1200"/>
+                <a:spcPts val="1000"/>
               </a:spcAft>
-              <a:defRPr b="1" sz="1600">
+              <a:defRPr b="1" sz="1550">
                 <a:solidFill>
                   <a:srgbClr val="0F1E4A"/>
                 </a:solidFill>
               </a:defRPr>
             </a:pPr>
             <a:r>
-              <a:t>Dense-Mode Protocols (Flood &amp; Prune)</a:t>
+              <a:t>PIM Dense Mode (PIM-DM / Flood &amp; Prune)</a:t>
             </a:r>
           </a:p>
           <a:p>
             <a:pPr>
               <a:spcAft>
-                <a:spcPts val="600"/>
+                <a:spcPts val="500"/>
               </a:spcAft>
-              <a:defRPr sz="1250">
-                <a:solidFill>
-                  <a:srgbClr val="1E293B"/>
+              <a:defRPr sz="1200">
+                <a:solidFill>
+                  <a:srgbClr val="0F172A"/>
                 </a:solidFill>
               </a:defRPr>
             </a:pPr>
             <a:r>
-              <a:t>• PIM-DM / DVMRP: Assumes multicast group members are densely distributed across almost every subnet</a:t>
+              <a:t>• Assumed Environment: Receivers densely populated across almost every subnet</a:t>
             </a:r>
           </a:p>
           <a:p>
             <a:pPr>
               <a:spcAft>
-                <a:spcPts val="600"/>
+                <a:spcPts val="500"/>
               </a:spcAft>
-              <a:defRPr sz="1250">
-                <a:solidFill>
-                  <a:srgbClr val="1E293B"/>
+              <a:defRPr sz="1200">
+                <a:solidFill>
+                  <a:srgbClr val="0F172A"/>
                 </a:solidFill>
               </a:defRPr>
             </a:pPr>
             <a:r>
-              <a:t>• Reverse Path Forwarding (RPF): Accepts packet only if it arrives on interface used to reach the source IP; drops duplicates</a:t>
+              <a:t>• Tree Construction: Source-Based Shortest Path Trees</a:t>
             </a:r>
           </a:p>
           <a:p>
             <a:pPr>
               <a:spcAft>
-                <a:spcPts val="600"/>
+                <a:spcPts val="500"/>
               </a:spcAft>
-              <a:defRPr sz="1250">
-                <a:solidFill>
-                  <a:srgbClr val="1E293B"/>
+              <a:defRPr sz="1200">
+                <a:solidFill>
+                  <a:srgbClr val="0F172A"/>
                 </a:solidFill>
               </a:defRPr>
             </a:pPr>
             <a:r>
-              <a:t>• Flood &amp; Prune: Floods initial traffic everywhere; routers with no active downstream members send 'Prune' messages</a:t>
+              <a:t>• Mechanics: 1. **Flood**: Broadcasts multicast traffic everywhere \n 2. **Prune**: Routers with no interested members send Prune messages back upstream \n 3. **Graft**: New receivers send Graft to re-attach</a:t>
             </a:r>
           </a:p>
           <a:p>
             <a:pPr>
               <a:spcAft>
-                <a:spcPts val="600"/>
+                <a:spcPts val="500"/>
               </a:spcAft>
-              <a:defRPr sz="1250">
-                <a:solidFill>
-                  <a:srgbClr val="1E293B"/>
+              <a:defRPr sz="1200">
+                <a:solidFill>
+                  <a:srgbClr val="0F172A"/>
                 </a:solidFill>
               </a:defRPr>
             </a:pPr>
             <a:r>
-              <a:t>• Grafting: Allows pruned branch to rejoin tree immediately when a new host joins</a:t>
+              <a:t>• Overhead: High periodic flooding overhead</a:t>
             </a:r>
           </a:p>
         </p:txBody>
@@ -4088,8 +4307,8 @@
         </p:nvSpPr>
         <p:spPr>
           <a:xfrm>
-            <a:off x="6309360" y="1280160"/>
-            <a:ext cx="5212080" cy="4846320"/>
+            <a:off x="6309360" y="1234440"/>
+            <a:ext cx="5212080" cy="4892040"/>
           </a:xfrm>
           <a:prstGeom prst="roundRect">
             <a:avLst/>
@@ -4099,7 +4318,7 @@
           </a:solidFill>
           <a:ln w="19050">
             <a:solidFill>
-              <a:srgbClr val="0F1E4A"/>
+              <a:srgbClr val="0E7490"/>
             </a:solidFill>
           </a:ln>
         </p:spPr>
@@ -4133,7 +4352,7 @@
         </p:nvSpPr>
         <p:spPr>
           <a:xfrm>
-            <a:off x="6492240" y="1417320"/>
+            <a:off x="6492240" y="1371600"/>
             <a:ext cx="4846320" cy="4572000"/>
           </a:xfrm>
           <a:prstGeom prst="rect">
@@ -4149,16 +4368,531 @@
           <a:p>
             <a:pPr>
               <a:spcAft>
-                <a:spcPts val="1200"/>
+                <a:spcPts val="1000"/>
               </a:spcAft>
-              <a:defRPr b="1" sz="1600">
+              <a:defRPr b="1" sz="1550">
                 <a:solidFill>
                   <a:srgbClr val="0E7490"/>
                 </a:solidFill>
               </a:defRPr>
             </a:pPr>
             <a:r>
-              <a:t>Sparse-Mode Protocols (Explicit Join)</a:t>
+              <a:t>PIM Sparse Mode (PIM-SM / Explicit Join)</a:t>
+            </a:r>
+          </a:p>
+          <a:p>
+            <a:pPr>
+              <a:spcAft>
+                <a:spcPts val="500"/>
+              </a:spcAft>
+              <a:defRPr sz="1200">
+                <a:solidFill>
+                  <a:srgbClr val="0F172A"/>
+                </a:solidFill>
+              </a:defRPr>
+            </a:pPr>
+            <a:r>
+              <a:t>• Assumed Environment: Receivers sparsely distributed across wide area WAN</a:t>
+            </a:r>
+          </a:p>
+          <a:p>
+            <a:pPr>
+              <a:spcAft>
+                <a:spcPts val="500"/>
+              </a:spcAft>
+              <a:defRPr sz="1200">
+                <a:solidFill>
+                  <a:srgbClr val="0F172A"/>
+                </a:solidFill>
+              </a:defRPr>
+            </a:pPr>
+            <a:r>
+              <a:t>• Tree Construction: Group-Shared Tree rooted at Rendezvous Point (RP)</a:t>
+            </a:r>
+          </a:p>
+          <a:p>
+            <a:pPr>
+              <a:spcAft>
+                <a:spcPts val="500"/>
+              </a:spcAft>
+              <a:defRPr sz="1200">
+                <a:solidFill>
+                  <a:srgbClr val="0F172A"/>
+                </a:solidFill>
+              </a:defRPr>
+            </a:pPr>
+            <a:r>
+              <a:t>• Mechanics: 1. Receivers send explicit `IGMP Join` -&gt; Router sends `PIM Join` towards RP \n 2. Sources register with RP \n 3. Traffic flows down shared tree</a:t>
+            </a:r>
+          </a:p>
+          <a:p>
+            <a:pPr>
+              <a:spcAft>
+                <a:spcPts val="500"/>
+              </a:spcAft>
+              <a:defRPr sz="1200">
+                <a:solidFill>
+                  <a:srgbClr val="0F172A"/>
+                </a:solidFill>
+              </a:defRPr>
+            </a:pPr>
+            <a:r>
+              <a:t>• Overhead: Zero flooding; highly scalable for enterprise IPTV</a:t>
+            </a:r>
+          </a:p>
+        </p:txBody>
+      </p:sp>
+      <p:sp>
+        <p:nvSpPr>
+          <p:cNvPr id="10" name="TextBox 9"/>
+          <p:cNvSpPr txBox="1"/>
+          <p:nvPr/>
+        </p:nvSpPr>
+        <p:spPr>
+          <a:xfrm>
+            <a:off x="731520" y="6327648"/>
+            <a:ext cx="10789920" cy="320040"/>
+          </a:xfrm>
+          <a:prstGeom prst="rect">
+            <a:avLst/>
+          </a:prstGeom>
+          <a:noFill/>
+        </p:spPr>
+        <p:txBody>
+          <a:bodyPr wrap="none">
+            <a:spAutoFit/>
+          </a:bodyPr>
+          <a:lstStyle/>
+          <a:p>
+            <a:pPr>
+              <a:defRPr sz="950">
+                <a:solidFill>
+                  <a:srgbClr val="64748B"/>
+                </a:solidFill>
+              </a:defRPr>
+            </a:pPr>
+            <a:r>
+              <a:t>PCCST501 Computer Networks | KTU 2024 Scheme | Prof. Anju Markose | Assistant Professor, Dept. of CSE | VJCET</a:t>
+            </a:r>
+          </a:p>
+        </p:txBody>
+      </p:sp>
+      <p:sp>
+        <p:nvSpPr>
+          <p:cNvPr id="11" name="TextBox 10"/>
+          <p:cNvSpPr txBox="1"/>
+          <p:nvPr/>
+        </p:nvSpPr>
+        <p:spPr>
+          <a:xfrm>
+            <a:off x="6858000" y="6327648"/>
+            <a:ext cx="4572000" cy="320040"/>
+          </a:xfrm>
+          <a:prstGeom prst="rect">
+            <a:avLst/>
+          </a:prstGeom>
+          <a:noFill/>
+        </p:spPr>
+        <p:txBody>
+          <a:bodyPr wrap="none">
+            <a:spAutoFit/>
+          </a:bodyPr>
+          <a:lstStyle/>
+          <a:p>
+            <a:pPr algn="r">
+              <a:defRPr sz="950">
+                <a:solidFill>
+                  <a:srgbClr val="64748B"/>
+                </a:solidFill>
+              </a:defRPr>
+            </a:pPr>
+            <a:r>
+              <a:t>Dept. of CSE, VJCET</a:t>
+            </a:r>
+          </a:p>
+        </p:txBody>
+      </p:sp>
+    </p:spTree>
+  </p:cSld>
+  <p:clrMapOvr>
+    <a:masterClrMapping/>
+  </p:clrMapOvr>
+</p:sld>
+</file>
+
+<file path=ppt/slides/slide4.xml><?xml version="1.0" encoding="utf-8"?>
+<p:sld xmlns:a="http://schemas.openxmlformats.org/drawingml/2006/main" xmlns:p="http://schemas.openxmlformats.org/presentationml/2006/main" xmlns:r="http://schemas.openxmlformats.org/officeDocument/2006/relationships">
+  <p:cSld>
+    <p:spTree>
+      <p:nvGrpSpPr>
+        <p:cNvPr id="1" name=""/>
+        <p:cNvGrpSpPr/>
+        <p:nvPr/>
+      </p:nvGrpSpPr>
+      <p:grpSpPr/>
+      <p:sp>
+        <p:nvSpPr>
+          <p:cNvPr id="2" name="Rectangle 1"/>
+          <p:cNvSpPr/>
+          <p:nvPr/>
+        </p:nvSpPr>
+        <p:spPr>
+          <a:xfrm>
+            <a:off x="0" y="0"/>
+            <a:ext cx="12191695" cy="1005840"/>
+          </a:xfrm>
+          <a:prstGeom prst="rect">
+            <a:avLst/>
+          </a:prstGeom>
+          <a:solidFill>
+            <a:srgbClr val="0F1E4A"/>
+          </a:solidFill>
+          <a:ln>
+            <a:noFill/>
+          </a:ln>
+        </p:spPr>
+        <p:style>
+          <a:lnRef idx="1">
+            <a:schemeClr val="accent1"/>
+          </a:lnRef>
+          <a:fillRef idx="3">
+            <a:schemeClr val="accent1"/>
+          </a:fillRef>
+          <a:effectRef idx="2">
+            <a:schemeClr val="accent1"/>
+          </a:effectRef>
+          <a:fontRef idx="minor">
+            <a:schemeClr val="lt1"/>
+          </a:fontRef>
+        </p:style>
+        <p:txBody>
+          <a:bodyPr rtlCol="0" anchor="ctr"/>
+          <a:lstStyle/>
+          <a:p>
+            <a:pPr algn="ctr"/>
+          </a:p>
+        </p:txBody>
+      </p:sp>
+      <p:sp>
+        <p:nvSpPr>
+          <p:cNvPr id="3" name="Rectangle 2"/>
+          <p:cNvSpPr/>
+          <p:nvPr/>
+        </p:nvSpPr>
+        <p:spPr>
+          <a:xfrm>
+            <a:off x="0" y="969264"/>
+            <a:ext cx="12191695" cy="36576"/>
+          </a:xfrm>
+          <a:prstGeom prst="rect">
+            <a:avLst/>
+          </a:prstGeom>
+          <a:solidFill>
+            <a:srgbClr val="D97706"/>
+          </a:solidFill>
+          <a:ln>
+            <a:noFill/>
+          </a:ln>
+        </p:spPr>
+        <p:style>
+          <a:lnRef idx="1">
+            <a:schemeClr val="accent1"/>
+          </a:lnRef>
+          <a:fillRef idx="3">
+            <a:schemeClr val="accent1"/>
+          </a:fillRef>
+          <a:effectRef idx="2">
+            <a:schemeClr val="accent1"/>
+          </a:effectRef>
+          <a:fontRef idx="minor">
+            <a:schemeClr val="lt1"/>
+          </a:fontRef>
+        </p:style>
+        <p:txBody>
+          <a:bodyPr rtlCol="0" anchor="ctr"/>
+          <a:lstStyle/>
+          <a:p>
+            <a:pPr algn="ctr"/>
+          </a:p>
+        </p:txBody>
+      </p:sp>
+      <p:sp>
+        <p:nvSpPr>
+          <p:cNvPr id="4" name="TextBox 3"/>
+          <p:cNvSpPr txBox="1"/>
+          <p:nvPr/>
+        </p:nvSpPr>
+        <p:spPr>
+          <a:xfrm>
+            <a:off x="731520" y="164592"/>
+            <a:ext cx="8412480" cy="685800"/>
+          </a:xfrm>
+          <a:prstGeom prst="rect">
+            <a:avLst/>
+          </a:prstGeom>
+          <a:noFill/>
+        </p:spPr>
+        <p:txBody>
+          <a:bodyPr wrap="none">
+            <a:spAutoFit/>
+          </a:bodyPr>
+          <a:lstStyle/>
+          <a:p>
+            <a:pPr>
+              <a:defRPr b="1" sz="2100">
+                <a:solidFill>
+                  <a:srgbClr val="F8FAFC"/>
+                </a:solidFill>
+              </a:defRPr>
+            </a:pPr>
+            <a:r>
+              <a:t>🎯 Exam Booster &amp; Review: Multicast Routing</a:t>
+            </a:r>
+          </a:p>
+        </p:txBody>
+      </p:sp>
+      <p:sp>
+        <p:nvSpPr>
+          <p:cNvPr id="5" name="TextBox 4"/>
+          <p:cNvSpPr txBox="1"/>
+          <p:nvPr/>
+        </p:nvSpPr>
+        <p:spPr>
+          <a:xfrm>
+            <a:off x="8229600" y="164592"/>
+            <a:ext cx="3291840" cy="685800"/>
+          </a:xfrm>
+          <a:prstGeom prst="rect">
+            <a:avLst/>
+          </a:prstGeom>
+          <a:noFill/>
+        </p:spPr>
+        <p:txBody>
+          <a:bodyPr wrap="none">
+            <a:spAutoFit/>
+          </a:bodyPr>
+          <a:lstStyle/>
+          <a:p>
+            <a:pPr algn="r">
+              <a:defRPr b="1" sz="1300">
+                <a:solidFill>
+                  <a:srgbClr val="D97706"/>
+                </a:solidFill>
+              </a:defRPr>
+            </a:pPr>
+            <a:r>
+              <a:t>M2.2.4</a:t>
+            </a:r>
+          </a:p>
+        </p:txBody>
+      </p:sp>
+      <p:sp>
+        <p:nvSpPr>
+          <p:cNvPr id="6" name="Rounded Rectangle 5"/>
+          <p:cNvSpPr/>
+          <p:nvPr/>
+        </p:nvSpPr>
+        <p:spPr>
+          <a:xfrm>
+            <a:off x="731520" y="1234440"/>
+            <a:ext cx="5303520" cy="4892040"/>
+          </a:xfrm>
+          <a:prstGeom prst="roundRect">
+            <a:avLst/>
+          </a:prstGeom>
+          <a:solidFill>
+            <a:srgbClr val="FEF3C7"/>
+          </a:solidFill>
+          <a:ln w="19050">
+            <a:solidFill>
+              <a:srgbClr val="D97706"/>
+            </a:solidFill>
+          </a:ln>
+        </p:spPr>
+        <p:style>
+          <a:lnRef idx="1">
+            <a:schemeClr val="accent1"/>
+          </a:lnRef>
+          <a:fillRef idx="3">
+            <a:schemeClr val="accent1"/>
+          </a:fillRef>
+          <a:effectRef idx="2">
+            <a:schemeClr val="accent1"/>
+          </a:effectRef>
+          <a:fontRef idx="minor">
+            <a:schemeClr val="lt1"/>
+          </a:fontRef>
+        </p:style>
+        <p:txBody>
+          <a:bodyPr rtlCol="0" anchor="ctr"/>
+          <a:lstStyle/>
+          <a:p>
+            <a:pPr algn="ctr"/>
+          </a:p>
+        </p:txBody>
+      </p:sp>
+      <p:sp>
+        <p:nvSpPr>
+          <p:cNvPr id="7" name="TextBox 6"/>
+          <p:cNvSpPr txBox="1"/>
+          <p:nvPr/>
+        </p:nvSpPr>
+        <p:spPr>
+          <a:xfrm>
+            <a:off x="914400" y="1371600"/>
+            <a:ext cx="4937760" cy="4572000"/>
+          </a:xfrm>
+          <a:prstGeom prst="rect">
+            <a:avLst/>
+          </a:prstGeom>
+          <a:noFill/>
+        </p:spPr>
+        <p:txBody>
+          <a:bodyPr wrap="square">
+            <a:spAutoFit/>
+          </a:bodyPr>
+          <a:lstStyle/>
+          <a:p>
+            <a:pPr>
+              <a:spcAft>
+                <a:spcPts val="1000"/>
+              </a:spcAft>
+              <a:defRPr b="1" sz="1450">
+                <a:solidFill>
+                  <a:srgbClr val="D97706"/>
+                </a:solidFill>
+              </a:defRPr>
+            </a:pPr>
+            <a:r>
+              <a:t>📚 KTU High-Yield Questions (K2 Understand)</a:t>
+            </a:r>
+          </a:p>
+          <a:p>
+            <a:pPr>
+              <a:spcAft>
+                <a:spcPts val="700"/>
+              </a:spcAft>
+              <a:defRPr sz="1200">
+                <a:solidFill>
+                  <a:srgbClr val="0F172A"/>
+                </a:solidFill>
+              </a:defRPr>
+            </a:pPr>
+            <a:r>
+              <a:t>Q: Explain the role of IGMP in managing multicast group memberships on local subnets. (6 Marks)</a:t>
+            </a:r>
+          </a:p>
+          <a:p>
+            <a:pPr>
+              <a:spcAft>
+                <a:spcPts val="700"/>
+              </a:spcAft>
+              <a:defRPr sz="1200">
+                <a:solidFill>
+                  <a:srgbClr val="0F172A"/>
+                </a:solidFill>
+              </a:defRPr>
+            </a:pPr>
+            <a:r>
+              <a:t>Q: Compare Source-Based Trees and Group-Shared Trees in multicast routing. (7 Marks)</a:t>
+            </a:r>
+          </a:p>
+          <a:p>
+            <a:pPr>
+              <a:spcAft>
+                <a:spcPts val="700"/>
+              </a:spcAft>
+              <a:defRPr sz="1200">
+                <a:solidFill>
+                  <a:srgbClr val="0F172A"/>
+                </a:solidFill>
+              </a:defRPr>
+            </a:pPr>
+            <a:r>
+              <a:t>Q: Explain the working of PIM-DM (Flood and Prune) versus PIM-SM (Rendezvous Point and Explicit Joins). (8 Marks)</a:t>
+            </a:r>
+          </a:p>
+        </p:txBody>
+      </p:sp>
+      <p:sp>
+        <p:nvSpPr>
+          <p:cNvPr id="8" name="Rounded Rectangle 7"/>
+          <p:cNvSpPr/>
+          <p:nvPr/>
+        </p:nvSpPr>
+        <p:spPr>
+          <a:xfrm>
+            <a:off x="6309360" y="1234440"/>
+            <a:ext cx="5212080" cy="4892040"/>
+          </a:xfrm>
+          <a:prstGeom prst="roundRect">
+            <a:avLst/>
+          </a:prstGeom>
+          <a:solidFill>
+            <a:srgbClr val="EEF2FF"/>
+          </a:solidFill>
+          <a:ln w="19050">
+            <a:solidFill>
+              <a:srgbClr val="0E7490"/>
+            </a:solidFill>
+          </a:ln>
+        </p:spPr>
+        <p:style>
+          <a:lnRef idx="1">
+            <a:schemeClr val="accent1"/>
+          </a:lnRef>
+          <a:fillRef idx="3">
+            <a:schemeClr val="accent1"/>
+          </a:fillRef>
+          <a:effectRef idx="2">
+            <a:schemeClr val="accent1"/>
+          </a:effectRef>
+          <a:fontRef idx="minor">
+            <a:schemeClr val="lt1"/>
+          </a:fontRef>
+        </p:style>
+        <p:txBody>
+          <a:bodyPr rtlCol="0" anchor="ctr"/>
+          <a:lstStyle/>
+          <a:p>
+            <a:pPr algn="ctr"/>
+          </a:p>
+        </p:txBody>
+      </p:sp>
+      <p:sp>
+        <p:nvSpPr>
+          <p:cNvPr id="9" name="TextBox 8"/>
+          <p:cNvSpPr txBox="1"/>
+          <p:nvPr/>
+        </p:nvSpPr>
+        <p:spPr>
+          <a:xfrm>
+            <a:off x="6492240" y="1371600"/>
+            <a:ext cx="4846320" cy="4572000"/>
+          </a:xfrm>
+          <a:prstGeom prst="rect">
+            <a:avLst/>
+          </a:prstGeom>
+          <a:noFill/>
+        </p:spPr>
+        <p:txBody>
+          <a:bodyPr wrap="square">
+            <a:spAutoFit/>
+          </a:bodyPr>
+          <a:lstStyle/>
+          <a:p>
+            <a:pPr>
+              <a:spcAft>
+                <a:spcPts val="1000"/>
+              </a:spcAft>
+              <a:defRPr b="1" sz="1450">
+                <a:solidFill>
+                  <a:srgbClr val="0E7490"/>
+                </a:solidFill>
+              </a:defRPr>
+            </a:pPr>
+            <a:r>
+              <a:t>💡 Critical Conceptual Takeaways</a:t>
             </a:r>
           </a:p>
           <a:p>
@@ -4166,14 +4900,14 @@
               <a:spcAft>
                 <a:spcPts val="600"/>
               </a:spcAft>
-              <a:defRPr sz="1250">
-                <a:solidFill>
-                  <a:srgbClr val="1E293B"/>
+              <a:defRPr sz="1200">
+                <a:solidFill>
+                  <a:srgbClr val="0F172A"/>
                 </a:solidFill>
               </a:defRPr>
             </a:pPr>
             <a:r>
-              <a:t>• PIM-SM: Assumes members are sparsely distributed across wide-area network</a:t>
+              <a:t>✔ IGMP connects local hosts to their edge multicast router.</a:t>
             </a:r>
           </a:p>
           <a:p>
@@ -4181,14 +4915,14 @@
               <a:spcAft>
                 <a:spcPts val="600"/>
               </a:spcAft>
-              <a:defRPr sz="1250">
-                <a:solidFill>
-                  <a:srgbClr val="1E293B"/>
+              <a:defRPr sz="1200">
+                <a:solidFill>
+                  <a:srgbClr val="0F172A"/>
                 </a:solidFill>
               </a:defRPr>
             </a:pPr>
             <a:r>
-              <a:t>• Rendezvous Point (RP): Core router where all sender sources register and receiver branches join</a:t>
+              <a:t>✔ Source-based trees minimize latency per sender; Shared trees minimize router state.</a:t>
             </a:r>
           </a:p>
           <a:p>
@@ -4196,29 +4930,14 @@
               <a:spcAft>
                 <a:spcPts val="600"/>
               </a:spcAft>
-              <a:defRPr sz="1250">
-                <a:solidFill>
-                  <a:srgbClr val="1E293B"/>
+              <a:defRPr sz="1200">
+                <a:solidFill>
+                  <a:srgbClr val="0F172A"/>
                 </a:solidFill>
               </a:defRPr>
             </a:pPr>
             <a:r>
-              <a:t>• Explicit Join: Traffic only forwarded to subnets that explicitly sent IGMP/PIM Join messages</a:t>
-            </a:r>
-          </a:p>
-          <a:p>
-            <a:pPr>
-              <a:spcAft>
-                <a:spcPts val="600"/>
-              </a:spcAft>
-              <a:defRPr sz="1250">
-                <a:solidFill>
-                  <a:srgbClr val="1E293B"/>
-                </a:solidFill>
-              </a:defRPr>
-            </a:pPr>
-            <a:r>
-              <a:t>• Scalability: Highly scalable for Internet-scale video broadcasting</a:t>
+              <a:t>✔ RPF algorithm discards packets that do not arrive on the shortest return path to the source.</a:t>
             </a:r>
           </a:p>
         </p:txBody>
@@ -4231,8 +4950,8 @@
         </p:nvSpPr>
         <p:spPr>
           <a:xfrm>
-            <a:off x="731520" y="6309360"/>
-            <a:ext cx="10789920" cy="365760"/>
+            <a:off x="731520" y="6327648"/>
+            <a:ext cx="10789920" cy="320040"/>
           </a:xfrm>
           <a:prstGeom prst="rect">
             <a:avLst/>
@@ -4254,6 +4973,41 @@
             </a:pPr>
             <a:r>
               <a:t>PCCST501 Computer Networks | KTU 2024 Scheme | Prof. Anju Markose | Assistant Professor, Dept. of CSE | VJCET</a:t>
+            </a:r>
+          </a:p>
+        </p:txBody>
+      </p:sp>
+      <p:sp>
+        <p:nvSpPr>
+          <p:cNvPr id="11" name="TextBox 10"/>
+          <p:cNvSpPr txBox="1"/>
+          <p:nvPr/>
+        </p:nvSpPr>
+        <p:spPr>
+          <a:xfrm>
+            <a:off x="6858000" y="6327648"/>
+            <a:ext cx="4572000" cy="320040"/>
+          </a:xfrm>
+          <a:prstGeom prst="rect">
+            <a:avLst/>
+          </a:prstGeom>
+          <a:noFill/>
+        </p:spPr>
+        <p:txBody>
+          <a:bodyPr wrap="none">
+            <a:spAutoFit/>
+          </a:bodyPr>
+          <a:lstStyle/>
+          <a:p>
+            <a:pPr algn="r">
+              <a:defRPr sz="950">
+                <a:solidFill>
+                  <a:srgbClr val="64748B"/>
+                </a:solidFill>
+              </a:defRPr>
+            </a:pPr>
+            <a:r>
+              <a:t>Dept. of CSE, VJCET</a:t>
             </a:r>
           </a:p>
         </p:txBody>
